--- a/prezentacie/t01w.pptx
+++ b/prezentacie/t01w.pptx
@@ -6,15 +6,17 @@
   </p:sldMasterIdLst>
   <p:sldIdLst>
     <p:sldId id="266" r:id="rId2"/>
-    <p:sldId id="257" r:id="rId3"/>
-    <p:sldId id="258" r:id="rId4"/>
-    <p:sldId id="259" r:id="rId5"/>
-    <p:sldId id="260" r:id="rId6"/>
-    <p:sldId id="268" r:id="rId7"/>
-    <p:sldId id="270" r:id="rId8"/>
-    <p:sldId id="271" r:id="rId9"/>
-    <p:sldId id="272" r:id="rId10"/>
-    <p:sldId id="273" r:id="rId11"/>
+    <p:sldId id="274" r:id="rId3"/>
+    <p:sldId id="257" r:id="rId4"/>
+    <p:sldId id="258" r:id="rId5"/>
+    <p:sldId id="259" r:id="rId6"/>
+    <p:sldId id="260" r:id="rId7"/>
+    <p:sldId id="268" r:id="rId8"/>
+    <p:sldId id="275" r:id="rId9"/>
+    <p:sldId id="270" r:id="rId10"/>
+    <p:sldId id="271" r:id="rId11"/>
+    <p:sldId id="272" r:id="rId12"/>
+    <p:sldId id="273" r:id="rId13"/>
   </p:sldIdLst>
   <p:sldSz cx="12192000" cy="6858000"/>
   <p:notesSz cx="6858000" cy="9144000"/>
@@ -252,7 +254,7 @@
           <a:p>
             <a:fld id="{10052495-8BC8-4CFB-94B1-B0429F101A0D}" type="datetimeFigureOut">
               <a:rPr lang="sk-SK" smtClean="0"/>
-              <a:t>8. 9. 2025</a:t>
+              <a:t>3. 9. 2026</a:t>
             </a:fld>
             <a:endParaRPr lang="sk-SK"/>
           </a:p>
@@ -422,7 +424,7 @@
           <a:p>
             <a:fld id="{10052495-8BC8-4CFB-94B1-B0429F101A0D}" type="datetimeFigureOut">
               <a:rPr lang="sk-SK" smtClean="0"/>
-              <a:t>8. 9. 2025</a:t>
+              <a:t>3. 9. 2026</a:t>
             </a:fld>
             <a:endParaRPr lang="sk-SK"/>
           </a:p>
@@ -602,7 +604,7 @@
           <a:p>
             <a:fld id="{10052495-8BC8-4CFB-94B1-B0429F101A0D}" type="datetimeFigureOut">
               <a:rPr lang="sk-SK" smtClean="0"/>
-              <a:t>8. 9. 2025</a:t>
+              <a:t>3. 9. 2026</a:t>
             </a:fld>
             <a:endParaRPr lang="sk-SK"/>
           </a:p>
@@ -772,7 +774,7 @@
           <a:p>
             <a:fld id="{10052495-8BC8-4CFB-94B1-B0429F101A0D}" type="datetimeFigureOut">
               <a:rPr lang="sk-SK" smtClean="0"/>
-              <a:t>8. 9. 2025</a:t>
+              <a:t>3. 9. 2026</a:t>
             </a:fld>
             <a:endParaRPr lang="sk-SK"/>
           </a:p>
@@ -1018,7 +1020,7 @@
           <a:p>
             <a:fld id="{10052495-8BC8-4CFB-94B1-B0429F101A0D}" type="datetimeFigureOut">
               <a:rPr lang="sk-SK" smtClean="0"/>
-              <a:t>8. 9. 2025</a:t>
+              <a:t>3. 9. 2026</a:t>
             </a:fld>
             <a:endParaRPr lang="sk-SK"/>
           </a:p>
@@ -1250,7 +1252,7 @@
           <a:p>
             <a:fld id="{10052495-8BC8-4CFB-94B1-B0429F101A0D}" type="datetimeFigureOut">
               <a:rPr lang="sk-SK" smtClean="0"/>
-              <a:t>8. 9. 2025</a:t>
+              <a:t>3. 9. 2026</a:t>
             </a:fld>
             <a:endParaRPr lang="sk-SK"/>
           </a:p>
@@ -1617,7 +1619,7 @@
           <a:p>
             <a:fld id="{10052495-8BC8-4CFB-94B1-B0429F101A0D}" type="datetimeFigureOut">
               <a:rPr lang="sk-SK" smtClean="0"/>
-              <a:t>8. 9. 2025</a:t>
+              <a:t>3. 9. 2026</a:t>
             </a:fld>
             <a:endParaRPr lang="sk-SK"/>
           </a:p>
@@ -1735,7 +1737,7 @@
           <a:p>
             <a:fld id="{10052495-8BC8-4CFB-94B1-B0429F101A0D}" type="datetimeFigureOut">
               <a:rPr lang="sk-SK" smtClean="0"/>
-              <a:t>8. 9. 2025</a:t>
+              <a:t>3. 9. 2026</a:t>
             </a:fld>
             <a:endParaRPr lang="sk-SK"/>
           </a:p>
@@ -1830,7 +1832,7 @@
           <a:p>
             <a:fld id="{10052495-8BC8-4CFB-94B1-B0429F101A0D}" type="datetimeFigureOut">
               <a:rPr lang="sk-SK" smtClean="0"/>
-              <a:t>8. 9. 2025</a:t>
+              <a:t>3. 9. 2026</a:t>
             </a:fld>
             <a:endParaRPr lang="sk-SK"/>
           </a:p>
@@ -2107,7 +2109,7 @@
           <a:p>
             <a:fld id="{10052495-8BC8-4CFB-94B1-B0429F101A0D}" type="datetimeFigureOut">
               <a:rPr lang="sk-SK" smtClean="0"/>
-              <a:t>8. 9. 2025</a:t>
+              <a:t>3. 9. 2026</a:t>
             </a:fld>
             <a:endParaRPr lang="sk-SK"/>
           </a:p>
@@ -2364,7 +2366,7 @@
           <a:p>
             <a:fld id="{10052495-8BC8-4CFB-94B1-B0429F101A0D}" type="datetimeFigureOut">
               <a:rPr lang="sk-SK" smtClean="0"/>
-              <a:t>8. 9. 2025</a:t>
+              <a:t>3. 9. 2026</a:t>
             </a:fld>
             <a:endParaRPr lang="sk-SK"/>
           </a:p>
@@ -2577,7 +2579,7 @@
           <a:p>
             <a:fld id="{10052495-8BC8-4CFB-94B1-B0429F101A0D}" type="datetimeFigureOut">
               <a:rPr lang="sk-SK" smtClean="0"/>
-              <a:t>8. 9. 2025</a:t>
+              <a:t>3. 9. 2026</a:t>
             </a:fld>
             <a:endParaRPr lang="sk-SK"/>
           </a:p>
@@ -3503,7 +3505,7 @@
             </a:br>
             <a:r>
               <a:rPr lang="sk-SK" b="1" dirty="0"/>
-              <a:t>Ing. Jozef Wagner PhD.</a:t>
+              <a:t>Ing. Jozef Wagner, PhD.</a:t>
             </a:r>
           </a:p>
           <a:p>
@@ -3556,6 +3558,419 @@
 </file>
 
 <file path=ppt/slides/slide10.xml><?xml version="1.0" encoding="utf-8"?>
+<p:sld xmlns:a="http://schemas.openxmlformats.org/drawingml/2006/main" xmlns:r="http://schemas.openxmlformats.org/officeDocument/2006/relationships" xmlns:p="http://schemas.openxmlformats.org/presentationml/2006/main">
+  <p:cSld>
+    <p:spTree>
+      <p:nvGrpSpPr>
+        <p:cNvPr id="1" name=""/>
+        <p:cNvGrpSpPr/>
+        <p:nvPr/>
+      </p:nvGrpSpPr>
+      <p:grpSpPr>
+        <a:xfrm>
+          <a:off x="0" y="0"/>
+          <a:ext cx="0" cy="0"/>
+          <a:chOff x="0" y="0"/>
+          <a:chExt cx="0" cy="0"/>
+        </a:xfrm>
+      </p:grpSpPr>
+      <p:sp>
+        <p:nvSpPr>
+          <p:cNvPr id="2" name="Nadpis 1">
+            <a:extLst>
+              <a:ext uri="{FF2B5EF4-FFF2-40B4-BE49-F238E27FC236}">
+                <a16:creationId xmlns:a16="http://schemas.microsoft.com/office/drawing/2014/main" id="{9614D3A7-D39F-DFA8-1324-8EE3D634FE37}"/>
+              </a:ext>
+            </a:extLst>
+          </p:cNvPr>
+          <p:cNvSpPr>
+            <a:spLocks noGrp="1"/>
+          </p:cNvSpPr>
+          <p:nvPr>
+            <p:ph type="title"/>
+          </p:nvPr>
+        </p:nvSpPr>
+        <p:spPr/>
+        <p:txBody>
+          <a:bodyPr/>
+          <a:lstStyle/>
+          <a:p>
+            <a:r>
+              <a:rPr lang="sk-SK" dirty="0">
+                <a:solidFill>
+                  <a:srgbClr val="FF0000"/>
+                </a:solidFill>
+                <a:highlight>
+                  <a:srgbClr val="00FFFF"/>
+                </a:highlight>
+              </a:rPr>
+              <a:t>Jazyk Java</a:t>
+            </a:r>
+          </a:p>
+        </p:txBody>
+      </p:sp>
+      <p:sp>
+        <p:nvSpPr>
+          <p:cNvPr id="3" name="Zástupný objekt pre obsah 2">
+            <a:extLst>
+              <a:ext uri="{FF2B5EF4-FFF2-40B4-BE49-F238E27FC236}">
+                <a16:creationId xmlns:a16="http://schemas.microsoft.com/office/drawing/2014/main" id="{1B6002A4-F245-D51B-5778-6E5E9ACC6532}"/>
+              </a:ext>
+            </a:extLst>
+          </p:cNvPr>
+          <p:cNvSpPr>
+            <a:spLocks noGrp="1"/>
+          </p:cNvSpPr>
+          <p:nvPr>
+            <p:ph idx="1"/>
+          </p:nvPr>
+        </p:nvSpPr>
+        <p:spPr/>
+        <p:txBody>
+          <a:bodyPr>
+            <a:normAutofit/>
+          </a:bodyPr>
+          <a:lstStyle/>
+          <a:p>
+            <a:pPr marL="0" indent="0">
+              <a:spcBef>
+                <a:spcPts val="1200"/>
+              </a:spcBef>
+              <a:buNone/>
+            </a:pPr>
+            <a:r>
+              <a:rPr lang="sk-SK" sz="2800" dirty="0">
+                <a:solidFill>
+                  <a:srgbClr val="FF0000"/>
+                </a:solidFill>
+                <a:highlight>
+                  <a:srgbClr val="00FFFF"/>
+                </a:highlight>
+              </a:rPr>
+              <a:t>Vlastnosti:</a:t>
+            </a:r>
+          </a:p>
+          <a:p>
+            <a:pPr lvl="1">
+              <a:spcBef>
+                <a:spcPts val="1200"/>
+              </a:spcBef>
+            </a:pPr>
+            <a:r>
+              <a:rPr lang="sk-SK" sz="2800" dirty="0">
+                <a:solidFill>
+                  <a:srgbClr val="FF0000"/>
+                </a:solidFill>
+                <a:highlight>
+                  <a:srgbClr val="00FFFF"/>
+                </a:highlight>
+              </a:rPr>
+              <a:t>objektovo orientovaný</a:t>
+            </a:r>
+          </a:p>
+          <a:p>
+            <a:pPr lvl="1">
+              <a:spcBef>
+                <a:spcPts val="1200"/>
+              </a:spcBef>
+            </a:pPr>
+            <a:r>
+              <a:rPr lang="sk-SK" sz="2800" dirty="0">
+                <a:solidFill>
+                  <a:srgbClr val="FF0000"/>
+                </a:solidFill>
+                <a:highlight>
+                  <a:srgbClr val="00FFFF"/>
+                </a:highlight>
+              </a:rPr>
+              <a:t>platformovo nezávislý </a:t>
+            </a:r>
+          </a:p>
+          <a:p>
+            <a:pPr lvl="1">
+              <a:spcBef>
+                <a:spcPts val="1200"/>
+              </a:spcBef>
+            </a:pPr>
+            <a:r>
+              <a:rPr lang="sk-SK" sz="2800" dirty="0">
+                <a:solidFill>
+                  <a:srgbClr val="FF0000"/>
+                </a:solidFill>
+                <a:highlight>
+                  <a:srgbClr val="00FFFF"/>
+                </a:highlight>
+              </a:rPr>
+              <a:t>staticky typovaný</a:t>
+            </a:r>
+            <a:r>
+              <a:rPr lang="sk-SK" sz="2800" dirty="0"/>
+              <a:t>: typy premenných sú kontrolované pri kompilácii </a:t>
+            </a:r>
+          </a:p>
+        </p:txBody>
+      </p:sp>
+    </p:spTree>
+    <p:extLst>
+      <p:ext uri="{BB962C8B-B14F-4D97-AF65-F5344CB8AC3E}">
+        <p14:creationId xmlns:p14="http://schemas.microsoft.com/office/powerpoint/2010/main" val="1498939752"/>
+      </p:ext>
+    </p:extLst>
+  </p:cSld>
+  <p:clrMapOvr>
+    <a:masterClrMapping/>
+  </p:clrMapOvr>
+</p:sld>
+</file>
+
+<file path=ppt/slides/slide11.xml><?xml version="1.0" encoding="utf-8"?>
+<p:sld xmlns:a="http://schemas.openxmlformats.org/drawingml/2006/main" xmlns:r="http://schemas.openxmlformats.org/officeDocument/2006/relationships" xmlns:p="http://schemas.openxmlformats.org/presentationml/2006/main">
+  <p:cSld>
+    <p:spTree>
+      <p:nvGrpSpPr>
+        <p:cNvPr id="1" name="">
+          <a:extLst>
+            <a:ext uri="{FF2B5EF4-FFF2-40B4-BE49-F238E27FC236}">
+              <a16:creationId xmlns:a16="http://schemas.microsoft.com/office/drawing/2014/main" id="{96D93EFC-746C-98C9-3659-DF243064562F}"/>
+            </a:ext>
+          </a:extLst>
+        </p:cNvPr>
+        <p:cNvGrpSpPr/>
+        <p:nvPr/>
+      </p:nvGrpSpPr>
+      <p:grpSpPr>
+        <a:xfrm>
+          <a:off x="0" y="0"/>
+          <a:ext cx="0" cy="0"/>
+          <a:chOff x="0" y="0"/>
+          <a:chExt cx="0" cy="0"/>
+        </a:xfrm>
+      </p:grpSpPr>
+      <p:sp>
+        <p:nvSpPr>
+          <p:cNvPr id="2" name="Nadpis 1">
+            <a:extLst>
+              <a:ext uri="{FF2B5EF4-FFF2-40B4-BE49-F238E27FC236}">
+                <a16:creationId xmlns:a16="http://schemas.microsoft.com/office/drawing/2014/main" id="{99DF7CD8-BD90-B9A9-1BD7-5D3BD9ECC44D}"/>
+              </a:ext>
+            </a:extLst>
+          </p:cNvPr>
+          <p:cNvSpPr>
+            <a:spLocks noGrp="1"/>
+          </p:cNvSpPr>
+          <p:nvPr>
+            <p:ph type="title"/>
+          </p:nvPr>
+        </p:nvSpPr>
+        <p:spPr/>
+        <p:txBody>
+          <a:bodyPr/>
+          <a:lstStyle/>
+          <a:p>
+            <a:r>
+              <a:rPr lang="sk-SK" dirty="0"/>
+              <a:t>Jazyk Java</a:t>
+            </a:r>
+          </a:p>
+        </p:txBody>
+      </p:sp>
+      <p:sp>
+        <p:nvSpPr>
+          <p:cNvPr id="3" name="Zástupný objekt pre obsah 2">
+            <a:extLst>
+              <a:ext uri="{FF2B5EF4-FFF2-40B4-BE49-F238E27FC236}">
+                <a16:creationId xmlns:a16="http://schemas.microsoft.com/office/drawing/2014/main" id="{994ACF6C-ED2C-AD2A-100D-0BFD2F7EE608}"/>
+              </a:ext>
+            </a:extLst>
+          </p:cNvPr>
+          <p:cNvSpPr>
+            <a:spLocks noGrp="1"/>
+          </p:cNvSpPr>
+          <p:nvPr>
+            <p:ph idx="1"/>
+          </p:nvPr>
+        </p:nvSpPr>
+        <p:spPr/>
+        <p:txBody>
+          <a:bodyPr>
+            <a:normAutofit/>
+          </a:bodyPr>
+          <a:lstStyle/>
+          <a:p>
+            <a:pPr marL="0" indent="0">
+              <a:spcBef>
+                <a:spcPts val="1200"/>
+              </a:spcBef>
+              <a:buNone/>
+            </a:pPr>
+            <a:r>
+              <a:rPr lang="sk-SK" sz="2800" dirty="0">
+                <a:solidFill>
+                  <a:srgbClr val="FF0000"/>
+                </a:solidFill>
+                <a:highlight>
+                  <a:srgbClr val="00FFFF"/>
+                </a:highlight>
+              </a:rPr>
+              <a:t>Použitie</a:t>
+            </a:r>
+            <a:r>
+              <a:rPr lang="sk-SK" sz="2800" dirty="0"/>
+              <a:t>:</a:t>
+            </a:r>
+          </a:p>
+          <a:p>
+            <a:pPr lvl="1">
+              <a:spcBef>
+                <a:spcPts val="1200"/>
+              </a:spcBef>
+            </a:pPr>
+            <a:r>
+              <a:rPr lang="sk-SK" sz="2800" dirty="0">
+                <a:solidFill>
+                  <a:srgbClr val="FF0000"/>
+                </a:solidFill>
+                <a:highlight>
+                  <a:srgbClr val="00FFFF"/>
+                </a:highlight>
+              </a:rPr>
+              <a:t>webový </a:t>
+            </a:r>
+            <a:r>
+              <a:rPr lang="sk-SK" sz="2800" dirty="0" err="1">
+                <a:solidFill>
+                  <a:srgbClr val="FF0000"/>
+                </a:solidFill>
+                <a:highlight>
+                  <a:srgbClr val="00FFFF"/>
+                </a:highlight>
+              </a:rPr>
+              <a:t>back</a:t>
+            </a:r>
+            <a:r>
+              <a:rPr lang="sk-SK" sz="2800" dirty="0">
+                <a:solidFill>
+                  <a:srgbClr val="FF0000"/>
+                </a:solidFill>
+                <a:highlight>
+                  <a:srgbClr val="00FFFF"/>
+                </a:highlight>
+              </a:rPr>
+              <a:t>-end</a:t>
+            </a:r>
+          </a:p>
+          <a:p>
+            <a:pPr lvl="1">
+              <a:spcBef>
+                <a:spcPts val="1200"/>
+              </a:spcBef>
+            </a:pPr>
+            <a:r>
+              <a:rPr lang="sk-SK" sz="2800" dirty="0">
+                <a:solidFill>
+                  <a:srgbClr val="FF0000"/>
+                </a:solidFill>
+                <a:highlight>
+                  <a:srgbClr val="00FFFF"/>
+                </a:highlight>
+              </a:rPr>
+              <a:t>Android aplikácie </a:t>
+            </a:r>
+            <a:r>
+              <a:rPr lang="sk-SK" sz="2800" i="1" dirty="0"/>
+              <a:t>(jazyk </a:t>
+            </a:r>
+            <a:r>
+              <a:rPr lang="sk-SK" sz="2800" i="1" dirty="0" err="1"/>
+              <a:t>Kotlin</a:t>
+            </a:r>
+            <a:r>
+              <a:rPr lang="sk-SK" sz="2800" i="1" dirty="0"/>
+              <a:t>)</a:t>
+            </a:r>
+          </a:p>
+          <a:p>
+            <a:pPr lvl="1">
+              <a:spcBef>
+                <a:spcPts val="1200"/>
+              </a:spcBef>
+            </a:pPr>
+            <a:r>
+              <a:rPr lang="sk-SK" sz="2800" dirty="0">
+                <a:solidFill>
+                  <a:srgbClr val="FF0000"/>
+                </a:solidFill>
+                <a:highlight>
+                  <a:srgbClr val="00FFFF"/>
+                </a:highlight>
+              </a:rPr>
+              <a:t>distribuované systémy (</a:t>
+            </a:r>
+            <a:r>
+              <a:rPr lang="sk-SK" sz="2800" dirty="0" err="1">
+                <a:solidFill>
+                  <a:srgbClr val="FF0000"/>
+                </a:solidFill>
+                <a:highlight>
+                  <a:srgbClr val="00FFFF"/>
+                </a:highlight>
+              </a:rPr>
+              <a:t>cloud</a:t>
+            </a:r>
+            <a:r>
+              <a:rPr lang="sk-SK" sz="2800" dirty="0">
+                <a:solidFill>
+                  <a:srgbClr val="FF0000"/>
+                </a:solidFill>
+                <a:highlight>
+                  <a:srgbClr val="00FFFF"/>
+                </a:highlight>
+              </a:rPr>
+              <a:t>)</a:t>
+            </a:r>
+          </a:p>
+          <a:p>
+            <a:pPr lvl="1">
+              <a:spcBef>
+                <a:spcPts val="1200"/>
+              </a:spcBef>
+            </a:pPr>
+            <a:r>
+              <a:rPr lang="sk-SK" sz="2800" dirty="0"/>
+              <a:t>veľké podnikové systémy</a:t>
+            </a:r>
+          </a:p>
+          <a:p>
+            <a:pPr lvl="1">
+              <a:spcBef>
+                <a:spcPts val="1200"/>
+              </a:spcBef>
+            </a:pPr>
+            <a:endParaRPr lang="sk-SK" sz="2800" dirty="0">
+              <a:solidFill>
+                <a:srgbClr val="FF0000"/>
+              </a:solidFill>
+              <a:highlight>
+                <a:srgbClr val="00FFFF"/>
+              </a:highlight>
+            </a:endParaRPr>
+          </a:p>
+        </p:txBody>
+      </p:sp>
+    </p:spTree>
+    <p:extLst>
+      <p:ext uri="{BB962C8B-B14F-4D97-AF65-F5344CB8AC3E}">
+        <p14:creationId xmlns:p14="http://schemas.microsoft.com/office/powerpoint/2010/main" val="4097473582"/>
+      </p:ext>
+    </p:extLst>
+  </p:cSld>
+  <p:clrMapOvr>
+    <a:masterClrMapping/>
+  </p:clrMapOvr>
+</p:sld>
+</file>
+
+<file path=ppt/slides/slide12.xml><?xml version="1.0" encoding="utf-8"?>
 <p:sld xmlns:a="http://schemas.openxmlformats.org/drawingml/2006/main" xmlns:r="http://schemas.openxmlformats.org/officeDocument/2006/relationships" xmlns:p="http://schemas.openxmlformats.org/presentationml/2006/main">
   <p:cSld>
     <p:spTree>
@@ -3636,7 +4051,14 @@
               <a:buNone/>
             </a:pPr>
             <a:r>
-              <a:rPr lang="sk-SK" sz="2800" dirty="0"/>
+              <a:rPr lang="sk-SK" sz="2800" dirty="0">
+                <a:solidFill>
+                  <a:srgbClr val="FF0000"/>
+                </a:solidFill>
+                <a:highlight>
+                  <a:srgbClr val="00FFFF"/>
+                </a:highlight>
+              </a:rPr>
               <a:t>Platformová nezávislosť:</a:t>
             </a:r>
           </a:p>
@@ -3647,15 +4069,36 @@
               </a:spcBef>
             </a:pPr>
             <a:r>
-              <a:rPr lang="sk-SK" sz="2800" dirty="0"/>
+              <a:rPr lang="sk-SK" sz="2800" dirty="0">
+                <a:solidFill>
+                  <a:srgbClr val="FF0000"/>
+                </a:solidFill>
+                <a:highlight>
+                  <a:srgbClr val="00FFFF"/>
+                </a:highlight>
+              </a:rPr>
               <a:t>kód sa kompiluje do </a:t>
             </a:r>
             <a:r>
-              <a:rPr lang="sk-SK" sz="2800" dirty="0" err="1"/>
+              <a:rPr lang="sk-SK" sz="2800" dirty="0" err="1">
+                <a:solidFill>
+                  <a:srgbClr val="FF0000"/>
+                </a:solidFill>
+                <a:highlight>
+                  <a:srgbClr val="00FFFF"/>
+                </a:highlight>
+              </a:rPr>
               <a:t>bytecode</a:t>
             </a:r>
             <a:r>
-              <a:rPr lang="sk-SK" sz="2800" dirty="0"/>
+              <a:rPr lang="sk-SK" sz="2800" dirty="0">
+                <a:solidFill>
+                  <a:srgbClr val="FF0000"/>
+                </a:solidFill>
+                <a:highlight>
+                  <a:srgbClr val="00FFFF"/>
+                </a:highlight>
+              </a:rPr>
               <a:t> a beží nad JVM</a:t>
             </a:r>
           </a:p>
@@ -3666,35 +4109,91 @@
               </a:spcBef>
             </a:pPr>
             <a:r>
-              <a:rPr lang="sk-SK" sz="2800" dirty="0"/>
+              <a:rPr lang="sk-SK" sz="2800" dirty="0">
+                <a:solidFill>
+                  <a:srgbClr val="FF0000"/>
+                </a:solidFill>
+                <a:highlight>
+                  <a:srgbClr val="00FFFF"/>
+                </a:highlight>
+              </a:rPr>
               <a:t>motto Javy: </a:t>
             </a:r>
             <a:r>
-              <a:rPr lang="sk-SK" sz="2800" dirty="0" err="1"/>
+              <a:rPr lang="sk-SK" sz="2800" dirty="0" err="1">
+                <a:solidFill>
+                  <a:srgbClr val="FF0000"/>
+                </a:solidFill>
+                <a:highlight>
+                  <a:srgbClr val="00FFFF"/>
+                </a:highlight>
+              </a:rPr>
               <a:t>Write</a:t>
             </a:r>
             <a:r>
-              <a:rPr lang="sk-SK" sz="2800" dirty="0"/>
+              <a:rPr lang="sk-SK" sz="2800" dirty="0">
+                <a:solidFill>
+                  <a:srgbClr val="FF0000"/>
+                </a:solidFill>
+                <a:highlight>
+                  <a:srgbClr val="00FFFF"/>
+                </a:highlight>
+              </a:rPr>
               <a:t> </a:t>
             </a:r>
             <a:r>
-              <a:rPr lang="sk-SK" sz="2800" dirty="0" err="1"/>
+              <a:rPr lang="sk-SK" sz="2800" dirty="0" err="1">
+                <a:solidFill>
+                  <a:srgbClr val="FF0000"/>
+                </a:solidFill>
+                <a:highlight>
+                  <a:srgbClr val="00FFFF"/>
+                </a:highlight>
+              </a:rPr>
               <a:t>Once</a:t>
             </a:r>
             <a:r>
-              <a:rPr lang="sk-SK" sz="2800" dirty="0"/>
+              <a:rPr lang="sk-SK" sz="2800" dirty="0">
+                <a:solidFill>
+                  <a:srgbClr val="FF0000"/>
+                </a:solidFill>
+                <a:highlight>
+                  <a:srgbClr val="00FFFF"/>
+                </a:highlight>
+              </a:rPr>
               <a:t>, Run </a:t>
             </a:r>
             <a:r>
-              <a:rPr lang="sk-SK" sz="2800" dirty="0" err="1"/>
+              <a:rPr lang="sk-SK" sz="2800" dirty="0" err="1">
+                <a:solidFill>
+                  <a:srgbClr val="FF0000"/>
+                </a:solidFill>
+                <a:highlight>
+                  <a:srgbClr val="00FFFF"/>
+                </a:highlight>
+              </a:rPr>
               <a:t>Anywhere</a:t>
             </a:r>
             <a:r>
-              <a:rPr lang="sk-SK" sz="2800" dirty="0"/>
+              <a:rPr lang="sk-SK" sz="2800" dirty="0">
+                <a:solidFill>
+                  <a:srgbClr val="FF0000"/>
+                </a:solidFill>
+                <a:highlight>
+                  <a:srgbClr val="00FFFF"/>
+                </a:highlight>
+              </a:rPr>
               <a:t> </a:t>
             </a:r>
             <a:r>
-              <a:rPr lang="sk-SK" sz="2800" i="1" dirty="0"/>
+              <a:rPr lang="sk-SK" sz="2800" i="1" dirty="0">
+                <a:solidFill>
+                  <a:srgbClr val="FF0000"/>
+                </a:solidFill>
+                <a:highlight>
+                  <a:srgbClr val="00FFFF"/>
+                </a:highlight>
+              </a:rPr>
               <a:t>(WORA)</a:t>
             </a:r>
           </a:p>
@@ -3705,48 +4204,112 @@
               </a:spcBef>
             </a:pPr>
             <a:r>
-              <a:rPr lang="sk-SK" sz="2800" dirty="0"/>
-              <a:t>virtuálny stroj JVM </a:t>
-            </a:r>
-            <a:r>
-              <a:rPr lang="sk-SK" sz="2800" i="1" dirty="0"/>
-              <a:t>(Java </a:t>
-            </a:r>
-            <a:r>
-              <a:rPr lang="sk-SK" sz="2800" i="1" dirty="0" err="1"/>
+              <a:rPr lang="sk-SK" sz="2800" dirty="0">
+                <a:solidFill>
+                  <a:srgbClr val="FF0000"/>
+                </a:solidFill>
+                <a:highlight>
+                  <a:srgbClr val="00FFFF"/>
+                </a:highlight>
+              </a:rPr>
+              <a:t>virtuálny stroj </a:t>
+            </a:r>
+            <a:r>
+              <a:rPr lang="sk-SK" sz="2800" b="1" dirty="0">
+                <a:solidFill>
+                  <a:srgbClr val="FF0000"/>
+                </a:solidFill>
+                <a:highlight>
+                  <a:srgbClr val="00FFFF"/>
+                </a:highlight>
+              </a:rPr>
+              <a:t>JVM</a:t>
+            </a:r>
+            <a:r>
+              <a:rPr lang="sk-SK" sz="2800" dirty="0">
+                <a:solidFill>
+                  <a:srgbClr val="FF0000"/>
+                </a:solidFill>
+                <a:highlight>
+                  <a:srgbClr val="00FFFF"/>
+                </a:highlight>
+              </a:rPr>
+              <a:t> </a:t>
+            </a:r>
+            <a:r>
+              <a:rPr lang="sk-SK" sz="2800" i="1" dirty="0">
+                <a:solidFill>
+                  <a:srgbClr val="FF0000"/>
+                </a:solidFill>
+                <a:highlight>
+                  <a:srgbClr val="00FFFF"/>
+                </a:highlight>
+              </a:rPr>
+              <a:t>(</a:t>
+            </a:r>
+            <a:r>
+              <a:rPr lang="sk-SK" sz="2800" b="1" i="1" dirty="0">
+                <a:solidFill>
+                  <a:srgbClr val="FF0000"/>
+                </a:solidFill>
+                <a:highlight>
+                  <a:srgbClr val="00FFFF"/>
+                </a:highlight>
+              </a:rPr>
+              <a:t>Java </a:t>
+            </a:r>
+            <a:r>
+              <a:rPr lang="sk-SK" sz="2800" b="1" i="1" dirty="0" err="1">
+                <a:solidFill>
+                  <a:srgbClr val="FF0000"/>
+                </a:solidFill>
+                <a:highlight>
+                  <a:srgbClr val="00FFFF"/>
+                </a:highlight>
+              </a:rPr>
               <a:t>Virtual</a:t>
             </a:r>
             <a:r>
-              <a:rPr lang="sk-SK" sz="2800" i="1" dirty="0"/>
+              <a:rPr lang="sk-SK" sz="2800" b="1" i="1" dirty="0">
+                <a:solidFill>
+                  <a:srgbClr val="FF0000"/>
+                </a:solidFill>
+                <a:highlight>
+                  <a:srgbClr val="00FFFF"/>
+                </a:highlight>
+              </a:rPr>
               <a:t> </a:t>
             </a:r>
             <a:r>
-              <a:rPr lang="sk-SK" sz="2800" i="1" dirty="0" err="1"/>
+              <a:rPr lang="sk-SK" sz="2800" b="1" i="1" dirty="0" err="1">
+                <a:solidFill>
+                  <a:srgbClr val="FF0000"/>
+                </a:solidFill>
+                <a:highlight>
+                  <a:srgbClr val="00FFFF"/>
+                </a:highlight>
+              </a:rPr>
               <a:t>Machine</a:t>
             </a:r>
             <a:r>
-              <a:rPr lang="sk-SK" sz="2800" i="1" dirty="0"/>
+              <a:rPr lang="sk-SK" sz="2800" i="1" dirty="0">
+                <a:solidFill>
+                  <a:srgbClr val="FF0000"/>
+                </a:solidFill>
+                <a:highlight>
+                  <a:srgbClr val="00FFFF"/>
+                </a:highlight>
+              </a:rPr>
               <a:t>)</a:t>
             </a:r>
-          </a:p>
-          <a:p>
-            <a:pPr lvl="1">
-              <a:spcBef>
-                <a:spcPts val="1200"/>
-              </a:spcBef>
-            </a:pPr>
-            <a:r>
-              <a:rPr lang="sk-SK" sz="2800" dirty="0"/>
-              <a:t>Java API: vždy dostupná </a:t>
-            </a:r>
-            <a:r>
-              <a:rPr lang="sk-SK" sz="2800" dirty="0" err="1"/>
-              <a:t>sada</a:t>
-            </a:r>
-            <a:r>
-              <a:rPr lang="sk-SK" sz="2800" dirty="0"/>
-              <a:t> knižníc na bežné použitie</a:t>
-            </a:r>
+            <a:endParaRPr lang="sk-SK" sz="2800" dirty="0">
+              <a:solidFill>
+                <a:srgbClr val="FF0000"/>
+              </a:solidFill>
+              <a:highlight>
+                <a:srgbClr val="00FFFF"/>
+              </a:highlight>
+            </a:endParaRPr>
           </a:p>
         </p:txBody>
       </p:sp>
@@ -3764,6 +4327,165 @@
 </file>
 
 <file path=ppt/slides/slide2.xml><?xml version="1.0" encoding="utf-8"?>
+<p:sld xmlns:a="http://schemas.openxmlformats.org/drawingml/2006/main" xmlns:r="http://schemas.openxmlformats.org/officeDocument/2006/relationships" xmlns:p="http://schemas.openxmlformats.org/presentationml/2006/main">
+  <p:cSld>
+    <p:spTree>
+      <p:nvGrpSpPr>
+        <p:cNvPr id="1" name=""/>
+        <p:cNvGrpSpPr/>
+        <p:nvPr/>
+      </p:nvGrpSpPr>
+      <p:grpSpPr>
+        <a:xfrm>
+          <a:off x="0" y="0"/>
+          <a:ext cx="0" cy="0"/>
+          <a:chOff x="0" y="0"/>
+          <a:chExt cx="0" cy="0"/>
+        </a:xfrm>
+      </p:grpSpPr>
+      <p:sp>
+        <p:nvSpPr>
+          <p:cNvPr id="3" name="Zástupný objekt pre obsah 2">
+            <a:extLst>
+              <a:ext uri="{FF2B5EF4-FFF2-40B4-BE49-F238E27FC236}">
+                <a16:creationId xmlns:a16="http://schemas.microsoft.com/office/drawing/2014/main" id="{5588ED00-8EB1-B24E-FB3F-A5FB48C42353}"/>
+              </a:ext>
+            </a:extLst>
+          </p:cNvPr>
+          <p:cNvSpPr>
+            <a:spLocks noGrp="1"/>
+          </p:cNvSpPr>
+          <p:nvPr>
+            <p:ph idx="1"/>
+          </p:nvPr>
+        </p:nvSpPr>
+        <p:spPr>
+          <a:xfrm>
+            <a:off x="838200" y="462116"/>
+            <a:ext cx="10515600" cy="5714847"/>
+          </a:xfrm>
+        </p:spPr>
+        <p:txBody>
+          <a:bodyPr>
+            <a:normAutofit/>
+          </a:bodyPr>
+          <a:lstStyle/>
+          <a:p>
+            <a:pPr marL="0" indent="0">
+              <a:buNone/>
+            </a:pPr>
+            <a:r>
+              <a:rPr lang="sk-SK" sz="4000" dirty="0">
+                <a:latin typeface="+mj-lt"/>
+              </a:rPr>
+              <a:t>Základné pokyny:</a:t>
+            </a:r>
+          </a:p>
+          <a:p>
+            <a:pPr lvl="1"/>
+            <a:r>
+              <a:rPr lang="sk-SK" sz="2800" dirty="0">
+                <a:latin typeface="+mj-lt"/>
+              </a:rPr>
+              <a:t>Dodržiavať školský poriadok</a:t>
+            </a:r>
+          </a:p>
+          <a:p>
+            <a:pPr lvl="1"/>
+            <a:r>
+              <a:rPr lang="sk-SK" sz="2800" dirty="0">
+                <a:latin typeface="+mj-lt"/>
+              </a:rPr>
+              <a:t>Pripravený na hodinu, zošit</a:t>
+            </a:r>
+          </a:p>
+          <a:p>
+            <a:pPr lvl="1"/>
+            <a:r>
+              <a:rPr lang="sk-SK" sz="2800" dirty="0">
+                <a:latin typeface="+mj-lt"/>
+              </a:rPr>
+              <a:t>Ústne a písomné skúšania</a:t>
+            </a:r>
+          </a:p>
+          <a:p>
+            <a:pPr lvl="1"/>
+            <a:r>
+              <a:rPr lang="sk-SK" sz="2800" dirty="0">
+                <a:latin typeface="+mj-lt"/>
+              </a:rPr>
+              <a:t>Ospravedlnenia pred začiatkom hodiny</a:t>
+            </a:r>
+          </a:p>
+          <a:p>
+            <a:endParaRPr lang="sk-SK" dirty="0">
+              <a:latin typeface="+mj-lt"/>
+            </a:endParaRPr>
+          </a:p>
+          <a:p>
+            <a:pPr marL="0" indent="0">
+              <a:buNone/>
+            </a:pPr>
+            <a:r>
+              <a:rPr lang="sk-SK" sz="4000" dirty="0">
+                <a:latin typeface="+mj-lt"/>
+              </a:rPr>
+              <a:t>Legenda:</a:t>
+            </a:r>
+          </a:p>
+          <a:p>
+            <a:pPr lvl="1"/>
+            <a:r>
+              <a:rPr lang="sk-SK" sz="2800" dirty="0">
+                <a:highlight>
+                  <a:srgbClr val="FFFF00"/>
+                </a:highlight>
+                <a:latin typeface="Consolas" panose="020B0609020204030204" pitchFamily="49" charset="0"/>
+              </a:rPr>
+              <a:t>Žltý text – kód</a:t>
+            </a:r>
+          </a:p>
+          <a:p>
+            <a:pPr lvl="1"/>
+            <a:r>
+              <a:rPr lang="sk-SK" sz="2800" dirty="0">
+                <a:solidFill>
+                  <a:srgbClr val="FF0000"/>
+                </a:solidFill>
+              </a:rPr>
+              <a:t>Červený text – poznámka do zošita</a:t>
+            </a:r>
+          </a:p>
+          <a:p>
+            <a:pPr lvl="1"/>
+            <a:r>
+              <a:rPr lang="sk-SK" sz="2800" dirty="0">
+                <a:solidFill>
+                  <a:srgbClr val="FF0000"/>
+                </a:solidFill>
+                <a:highlight>
+                  <a:srgbClr val="00FFFF"/>
+                </a:highlight>
+              </a:rPr>
+              <a:t>Modré pozadie – poznámka do zošita</a:t>
+            </a:r>
+          </a:p>
+        </p:txBody>
+      </p:sp>
+    </p:spTree>
+    <p:extLst>
+      <p:ext uri="{BB962C8B-B14F-4D97-AF65-F5344CB8AC3E}">
+        <p14:creationId xmlns:p14="http://schemas.microsoft.com/office/powerpoint/2010/main" val="1374612892"/>
+      </p:ext>
+    </p:extLst>
+  </p:cSld>
+  <p:clrMapOvr>
+    <a:masterClrMapping/>
+  </p:clrMapOvr>
+</p:sld>
+</file>
+
+<file path=ppt/slides/slide3.xml><?xml version="1.0" encoding="utf-8"?>
 <p:sld xmlns:a="http://schemas.openxmlformats.org/drawingml/2006/main" xmlns:r="http://schemas.openxmlformats.org/officeDocument/2006/relationships" xmlns:p="http://schemas.openxmlformats.org/presentationml/2006/main">
   <p:cSld>
     <p:bg>
@@ -4296,7 +5018,7 @@
             </a:pPr>
             <a:r>
               <a:rPr lang="sk-SK" dirty="0"/>
-              <a:t>Digitálni asistenti</a:t>
+              <a:t>AI v programovaní</a:t>
             </a:r>
           </a:p>
           <a:p>
@@ -4334,7 +5056,7 @@
 </p:sld>
 </file>
 
-<file path=ppt/slides/slide3.xml><?xml version="1.0" encoding="utf-8"?>
+<file path=ppt/slides/slide4.xml><?xml version="1.0" encoding="utf-8"?>
 <p:sld xmlns:a="http://schemas.openxmlformats.org/drawingml/2006/main" xmlns:r="http://schemas.openxmlformats.org/officeDocument/2006/relationships" xmlns:p="http://schemas.openxmlformats.org/presentationml/2006/main">
   <p:cSld>
     <p:bg>
@@ -4383,8 +5105,15 @@
           <a:lstStyle/>
           <a:p>
             <a:r>
-              <a:rPr lang="sk-SK" sz="4000" dirty="0"/>
-              <a:t>Digitálni Asistenti</a:t>
+              <a:rPr lang="sk-SK" sz="4000" dirty="0">
+                <a:solidFill>
+                  <a:srgbClr val="FF0000"/>
+                </a:solidFill>
+                <a:highlight>
+                  <a:srgbClr val="00FFFF"/>
+                </a:highlight>
+              </a:rPr>
+              <a:t>AI</a:t>
             </a:r>
           </a:p>
         </p:txBody>
@@ -4407,8 +5136,8 @@
         </p:nvSpPr>
         <p:spPr>
           <a:xfrm>
-            <a:off x="2346958" y="1845734"/>
-            <a:ext cx="7692393" cy="4217609"/>
+            <a:off x="1285074" y="1690688"/>
+            <a:ext cx="9323932" cy="4217609"/>
           </a:xfrm>
         </p:spPr>
         <p:txBody>
@@ -4424,58 +5153,16 @@
               <a:buNone/>
             </a:pPr>
             <a:r>
-              <a:rPr lang="fr-FR" sz="2800" i="1" dirty="0"/>
-              <a:t>AI </a:t>
-            </a:r>
-            <a:r>
-              <a:rPr lang="fr-FR" sz="2800" i="1" dirty="0" err="1"/>
-              <a:t>Asistent</a:t>
-            </a:r>
-            <a:r>
-              <a:rPr lang="sk-SK" sz="2800" i="1" dirty="0"/>
-              <a:t>:</a:t>
-            </a:r>
-            <a:r>
-              <a:rPr lang="fr-FR" sz="2800" dirty="0"/>
-              <a:t> </a:t>
-            </a:r>
-            <a:r>
-              <a:rPr lang="fr-FR" sz="2800" dirty="0" err="1"/>
-              <a:t>reaktívny</a:t>
-            </a:r>
-            <a:r>
-              <a:rPr lang="fr-FR" sz="2800" dirty="0"/>
-              <a:t>, </a:t>
-            </a:r>
-            <a:r>
-              <a:rPr lang="fr-FR" sz="2800" dirty="0" err="1"/>
-              <a:t>odpovedá</a:t>
-            </a:r>
-            <a:r>
-              <a:rPr lang="fr-FR" sz="2800" dirty="0"/>
-              <a:t> na </a:t>
-            </a:r>
-            <a:r>
-              <a:rPr lang="fr-FR" sz="2800" dirty="0" err="1"/>
-              <a:t>otázky</a:t>
-            </a:r>
-            <a:r>
-              <a:rPr lang="fr-FR" sz="2800" dirty="0"/>
-              <a:t>, </a:t>
-            </a:r>
-            <a:r>
-              <a:rPr lang="fr-FR" sz="2800" dirty="0" err="1"/>
-              <a:t>jednoduché</a:t>
-            </a:r>
-            <a:r>
-              <a:rPr lang="fr-FR" sz="2800" dirty="0"/>
-              <a:t> </a:t>
-            </a:r>
-            <a:r>
-              <a:rPr lang="fr-FR" sz="2800" dirty="0" err="1"/>
-              <a:t>úlohy</a:t>
-            </a:r>
-            <a:endParaRPr lang="fr-FR" sz="2800" dirty="0"/>
+              <a:rPr lang="fr-FR" sz="2800" i="1" dirty="0">
+                <a:solidFill>
+                  <a:srgbClr val="FF0000"/>
+                </a:solidFill>
+                <a:highlight>
+                  <a:srgbClr val="00FFFF"/>
+                </a:highlight>
+              </a:rPr>
+              <a:t>AI Asistent - odpovedá na otázky</a:t>
+            </a:r>
           </a:p>
           <a:p>
             <a:pPr marL="0" indent="0">
@@ -4485,54 +5172,16 @@
               <a:buNone/>
             </a:pPr>
             <a:r>
-              <a:rPr lang="fr-FR" sz="2800" i="1" dirty="0"/>
-              <a:t>AI Agent</a:t>
-            </a:r>
-            <a:r>
-              <a:rPr lang="sk-SK" sz="2800" i="1" dirty="0"/>
-              <a:t>:</a:t>
-            </a:r>
-            <a:r>
-              <a:rPr lang="fr-FR" sz="2800" dirty="0"/>
-              <a:t> </a:t>
-            </a:r>
-            <a:r>
-              <a:rPr lang="fr-FR" sz="2800" dirty="0" err="1"/>
-              <a:t>proaktívny</a:t>
-            </a:r>
-            <a:r>
-              <a:rPr lang="fr-FR" sz="2800" dirty="0"/>
-              <a:t>, </a:t>
-            </a:r>
-            <a:r>
-              <a:rPr lang="fr-FR" sz="2800" dirty="0" err="1"/>
-              <a:t>autonómny</a:t>
-            </a:r>
-            <a:r>
-              <a:rPr lang="fr-FR" sz="2800" dirty="0"/>
-              <a:t>, </a:t>
-            </a:r>
-            <a:r>
-              <a:rPr lang="fr-FR" sz="2800" dirty="0" err="1"/>
-              <a:t>zložité</a:t>
-            </a:r>
-            <a:r>
-              <a:rPr lang="fr-FR" sz="2800" dirty="0"/>
-              <a:t> </a:t>
-            </a:r>
-            <a:r>
-              <a:rPr lang="fr-FR" sz="2800" dirty="0" err="1"/>
-              <a:t>viackrokové</a:t>
-            </a:r>
-            <a:r>
-              <a:rPr lang="fr-FR" sz="2800" dirty="0"/>
-              <a:t> </a:t>
-            </a:r>
-            <a:r>
-              <a:rPr lang="fr-FR" sz="2800" dirty="0" err="1"/>
-              <a:t>úlohy</a:t>
-            </a:r>
-            <a:endParaRPr lang="fr-FR" sz="2800" dirty="0"/>
+              <a:rPr lang="fr-FR" sz="2800" i="1" dirty="0">
+                <a:solidFill>
+                  <a:srgbClr val="FF0000"/>
+                </a:solidFill>
+                <a:highlight>
+                  <a:srgbClr val="00FFFF"/>
+                </a:highlight>
+              </a:rPr>
+              <a:t>AI Agent - samostatne vykonáva úlohy</a:t>
+            </a:r>
           </a:p>
           <a:p>
             <a:pPr marL="0" indent="0">
@@ -4541,7 +5190,25 @@
               </a:spcBef>
               <a:buNone/>
             </a:pPr>
-            <a:endParaRPr lang="fr-FR" sz="2800" dirty="0"/>
+            <a:r>
+              <a:rPr lang="fr-FR" sz="2800" i="1" dirty="0">
+                <a:solidFill>
+                  <a:srgbClr val="FF0000"/>
+                </a:solidFill>
+                <a:highlight>
+                  <a:srgbClr val="00FFFF"/>
+                </a:highlight>
+              </a:rPr>
+              <a:t>AI Slop - odpad, vznikne ak AI slepo dôverujem</a:t>
+            </a:r>
+            <a:endParaRPr lang="sk-SK" sz="2800" i="1" dirty="0">
+              <a:solidFill>
+                <a:srgbClr val="FF0000"/>
+              </a:solidFill>
+              <a:highlight>
+                <a:srgbClr val="00FFFF"/>
+              </a:highlight>
+            </a:endParaRPr>
           </a:p>
           <a:p>
             <a:pPr marL="0" indent="0">
@@ -4550,46 +5217,7 @@
               </a:spcBef>
               <a:buNone/>
             </a:pPr>
-            <a:r>
-              <a:rPr lang="fr-FR" sz="2800" i="1" dirty="0"/>
-              <a:t>AI </a:t>
-            </a:r>
-            <a:r>
-              <a:rPr lang="fr-FR" sz="2800" i="1" dirty="0" err="1"/>
-              <a:t>Prompting</a:t>
-            </a:r>
-            <a:r>
-              <a:rPr lang="sk-SK" sz="2800" i="1" dirty="0"/>
-              <a:t>:</a:t>
-            </a:r>
-            <a:r>
-              <a:rPr lang="fr-FR" sz="2800" dirty="0"/>
-              <a:t> </a:t>
-            </a:r>
-            <a:r>
-              <a:rPr lang="fr-FR" sz="2800" dirty="0" err="1"/>
-              <a:t>vytváranie</a:t>
-            </a:r>
-            <a:r>
-              <a:rPr lang="fr-FR" sz="2800" dirty="0"/>
-              <a:t> </a:t>
-            </a:r>
-            <a:r>
-              <a:rPr lang="fr-FR" sz="2800" dirty="0" err="1"/>
-              <a:t>inštrukcií</a:t>
-            </a:r>
-            <a:r>
-              <a:rPr lang="fr-FR" sz="2800" dirty="0"/>
-              <a:t> </a:t>
-            </a:r>
-            <a:r>
-              <a:rPr lang="fr-FR" sz="2800" dirty="0" err="1"/>
-              <a:t>pre</a:t>
-            </a:r>
-            <a:r>
-              <a:rPr lang="fr-FR" sz="2800" dirty="0"/>
-              <a:t> AI</a:t>
-            </a:r>
+            <a:endParaRPr lang="sk-SK" i="1" dirty="0"/>
           </a:p>
           <a:p>
             <a:pPr marL="0" indent="0">
@@ -4599,81 +5227,29 @@
               <a:buNone/>
             </a:pPr>
             <a:r>
-              <a:rPr lang="fr-FR" sz="2800" i="1" dirty="0"/>
-              <a:t>AI </a:t>
-            </a:r>
-            <a:r>
-              <a:rPr lang="fr-FR" sz="2800" i="1" dirty="0" err="1"/>
-              <a:t>Verifikácia</a:t>
-            </a:r>
-            <a:r>
-              <a:rPr lang="sk-SK" sz="2800" i="1" dirty="0"/>
-              <a:t>:</a:t>
-            </a:r>
-            <a:r>
-              <a:rPr lang="fr-FR" sz="2800" dirty="0"/>
-              <a:t> </a:t>
-            </a:r>
-            <a:r>
-              <a:rPr lang="fr-FR" sz="2800" dirty="0" err="1"/>
-              <a:t>kontrola</a:t>
-            </a:r>
-            <a:r>
-              <a:rPr lang="fr-FR" sz="2800" dirty="0"/>
-              <a:t> </a:t>
-            </a:r>
-            <a:r>
-              <a:rPr lang="fr-FR" sz="2800" dirty="0" err="1"/>
-              <a:t>presnosti</a:t>
-            </a:r>
-            <a:r>
-              <a:rPr lang="fr-FR" sz="2800" dirty="0"/>
-              <a:t>, </a:t>
-            </a:r>
-            <a:r>
-              <a:rPr lang="fr-FR" sz="2800" dirty="0" err="1"/>
-              <a:t>spoľahlovosti</a:t>
-            </a:r>
-            <a:r>
-              <a:rPr lang="fr-FR" sz="2800" dirty="0"/>
-              <a:t> a </a:t>
-            </a:r>
-            <a:r>
-              <a:rPr lang="fr-FR" sz="2800" dirty="0" err="1"/>
-              <a:t>kvality</a:t>
-            </a:r>
-            <a:r>
-              <a:rPr lang="fr-FR" sz="2800" dirty="0"/>
-              <a:t> </a:t>
-            </a:r>
-            <a:r>
-              <a:rPr lang="fr-FR" sz="2800" dirty="0" err="1"/>
-              <a:t>výstupu</a:t>
-            </a:r>
-            <a:r>
-              <a:rPr lang="sk-SK" sz="2800" dirty="0"/>
-              <a:t>. Je </a:t>
-            </a:r>
-            <a:r>
-              <a:rPr lang="fr-FR" sz="2800" dirty="0" err="1"/>
-              <a:t>vždy</a:t>
-            </a:r>
-            <a:r>
-              <a:rPr lang="fr-FR" sz="2800" dirty="0"/>
-              <a:t> </a:t>
-            </a:r>
-            <a:r>
-              <a:rPr lang="fr-FR" sz="2800" dirty="0" err="1"/>
-              <a:t>riadená</a:t>
-            </a:r>
-            <a:r>
-              <a:rPr lang="fr-FR" sz="2800" dirty="0"/>
-              <a:t> </a:t>
-            </a:r>
-            <a:r>
-              <a:rPr lang="fr-FR" sz="2800" dirty="0" err="1"/>
-              <a:t>človekom</a:t>
-            </a:r>
+              <a:rPr lang="sk-SK" dirty="0"/>
+              <a:t>AI transformovala programovanie</a:t>
+            </a:r>
+          </a:p>
+          <a:p>
+            <a:pPr marL="0" indent="0">
+              <a:spcBef>
+                <a:spcPts val="1200"/>
+              </a:spcBef>
+              <a:buNone/>
+            </a:pPr>
+            <a:r>
+              <a:rPr lang="sk-SK" dirty="0"/>
+              <a:t>Vývojári trávia menej času písaním a viac recenziou a overovaním AI výstupu</a:t>
+            </a:r>
+          </a:p>
+          <a:p>
+            <a:pPr marL="0" indent="0">
+              <a:spcBef>
+                <a:spcPts val="1200"/>
+              </a:spcBef>
+              <a:buNone/>
+            </a:pPr>
             <a:endParaRPr lang="sk-SK" sz="2800" dirty="0"/>
           </a:p>
         </p:txBody>
@@ -4691,7 +5267,7 @@
 </p:sld>
 </file>
 
-<file path=ppt/slides/slide4.xml><?xml version="1.0" encoding="utf-8"?>
+<file path=ppt/slides/slide5.xml><?xml version="1.0" encoding="utf-8"?>
 <p:sld xmlns:a="http://schemas.openxmlformats.org/drawingml/2006/main" xmlns:r="http://schemas.openxmlformats.org/officeDocument/2006/relationships" xmlns:p="http://schemas.openxmlformats.org/presentationml/2006/main">
   <p:cSld>
     <p:bg>
@@ -4799,7 +5375,7 @@
 </p:sld>
 </file>
 
-<file path=ppt/slides/slide5.xml><?xml version="1.0" encoding="utf-8"?>
+<file path=ppt/slides/slide6.xml><?xml version="1.0" encoding="utf-8"?>
 <p:sld xmlns:a="http://schemas.openxmlformats.org/drawingml/2006/main" xmlns:r="http://schemas.openxmlformats.org/officeDocument/2006/relationships" xmlns:p="http://schemas.openxmlformats.org/presentationml/2006/main">
   <p:cSld>
     <p:bg>
@@ -4876,7 +5452,7 @@
 </p:sld>
 </file>
 
-<file path=ppt/slides/slide6.xml><?xml version="1.0" encoding="utf-8"?>
+<file path=ppt/slides/slide7.xml><?xml version="1.0" encoding="utf-8"?>
 <p:sld xmlns:a="http://schemas.openxmlformats.org/drawingml/2006/main" xmlns:r="http://schemas.openxmlformats.org/officeDocument/2006/relationships" xmlns:p="http://schemas.openxmlformats.org/presentationml/2006/main">
   <p:cSld>
     <p:spTree>
@@ -4916,7 +5492,7 @@
           <a:p>
             <a:r>
               <a:rPr lang="sk-SK" dirty="0"/>
-              <a:t>Objektovo orientované programovanie</a:t>
+              <a:t>Nahradia nás AI agenti?</a:t>
             </a:r>
           </a:p>
         </p:txBody>
@@ -4939,8 +5515,8 @@
         </p:nvSpPr>
         <p:spPr>
           <a:xfrm>
-            <a:off x="2152651" y="1825625"/>
-            <a:ext cx="6936921" cy="4351338"/>
+            <a:off x="924233" y="1825625"/>
+            <a:ext cx="10707328" cy="4667250"/>
           </a:xfrm>
         </p:spPr>
         <p:txBody>
@@ -4956,80 +5532,97 @@
               <a:buNone/>
             </a:pPr>
             <a:r>
-              <a:rPr lang="sk-SK" sz="2800" dirty="0"/>
-              <a:t>Paradigmy v programovaní:</a:t>
-            </a:r>
-          </a:p>
-          <a:p>
-            <a:pPr lvl="1">
+              <a:rPr lang="sk-SK" dirty="0"/>
+              <a:t>Programátorské miesta sa posunuli od písania kódu k </a:t>
+            </a:r>
+            <a:r>
+              <a:rPr lang="sk-SK" b="1" dirty="0"/>
+              <a:t>zadávaniu požiadaviek</a:t>
+            </a:r>
+            <a:r>
+              <a:rPr lang="sk-SK" dirty="0"/>
+              <a:t>, </a:t>
+            </a:r>
+            <a:r>
+              <a:rPr lang="sk-SK" b="1" dirty="0"/>
+              <a:t>návrhu systému</a:t>
+            </a:r>
+            <a:r>
+              <a:rPr lang="sk-SK" dirty="0"/>
+              <a:t> a </a:t>
+            </a:r>
+            <a:r>
+              <a:rPr lang="sk-SK" b="1" dirty="0"/>
+              <a:t>overovaniu</a:t>
+            </a:r>
+            <a:r>
+              <a:rPr lang="sk-SK" dirty="0"/>
+              <a:t> toho, čo vygeneruje AI. </a:t>
+            </a:r>
+          </a:p>
+          <a:p>
+            <a:pPr marL="0" indent="0">
               <a:spcBef>
                 <a:spcPts val="1200"/>
               </a:spcBef>
+              <a:buNone/>
             </a:pPr>
             <a:r>
-              <a:rPr lang="sk-SK" sz="2800" i="1" dirty="0"/>
-              <a:t>Štruktúrované:</a:t>
-            </a:r>
+              <a:rPr lang="sk-SK" dirty="0"/>
+              <a:t>Tradičné juniorské pozície sú ohrozené a dopyt sa sústreďuje na seniorov. Znamená to, že </a:t>
+            </a:r>
+            <a:r>
+              <a:rPr lang="sk-SK" b="1" dirty="0"/>
+              <a:t>seniorské zručnosti si musí budovať skôr a väčšinou sám</a:t>
+            </a:r>
+            <a:r>
+              <a:rPr lang="sk-SK" dirty="0"/>
+              <a:t>.</a:t>
+            </a:r>
+          </a:p>
+          <a:p>
+            <a:pPr marL="0" lvl="0" indent="0">
+              <a:buNone/>
+            </a:pPr>
+            <a:r>
+              <a:rPr lang="sk-SK" dirty="0"/>
+              <a:t>Bez znalosti základov sa robia 3 </a:t>
+            </a:r>
+            <a:r>
+              <a:rPr lang="sk-SK"/>
+              <a:t>typické chyby:</a:t>
+            </a:r>
+            <a:endParaRPr lang="sk-SK" dirty="0"/>
+          </a:p>
+          <a:p>
+            <a:pPr lvl="1"/>
             <a:r>
               <a:rPr lang="sk-SK" sz="2800" dirty="0"/>
-              <a:t> sekvencie príkazov, podmienky, cykly</a:t>
-            </a:r>
-          </a:p>
-          <a:p>
-            <a:pPr lvl="1">
+              <a:t>prijme sa kód, ktorý „vyzerá dobre“, ale je logicky chybný</a:t>
+            </a:r>
+          </a:p>
+          <a:p>
+            <a:pPr lvl="1"/>
+            <a:r>
+              <a:rPr lang="sk-SK" sz="2800" dirty="0"/>
+              <a:t>nevie sa správne zadať úloha. AI vyprodukuje náhodný prototyp, nezapadajúci do celkovej architektúry.</a:t>
+            </a:r>
+          </a:p>
+          <a:p>
+            <a:pPr lvl="1"/>
+            <a:r>
+              <a:rPr lang="sk-SK" sz="2800" dirty="0"/>
+              <a:t>neschopnosť opraviť zlyhanie u vecí, ktoré AI „skoro trafí“</a:t>
+            </a:r>
+          </a:p>
+          <a:p>
+            <a:pPr marL="0" indent="0">
               <a:spcBef>
                 <a:spcPts val="1200"/>
               </a:spcBef>
+              <a:buNone/>
             </a:pPr>
-            <a:r>
-              <a:rPr lang="sk-SK" sz="2800" i="1" dirty="0"/>
-              <a:t>Procedurálne:</a:t>
-            </a:r>
-            <a:r>
-              <a:rPr lang="sk-SK" sz="2800" dirty="0"/>
-              <a:t> podprogramy, ktoré sa vedia navzájom volať</a:t>
-            </a:r>
-          </a:p>
-          <a:p>
-            <a:pPr lvl="1">
-              <a:spcBef>
-                <a:spcPts val="1200"/>
-              </a:spcBef>
-            </a:pPr>
-            <a:r>
-              <a:rPr lang="sk-SK" sz="2800" i="1" dirty="0"/>
-              <a:t>Objektovo orientované:</a:t>
-            </a:r>
-            <a:r>
-              <a:rPr lang="sk-SK" sz="2800" dirty="0"/>
-              <a:t> objekty, zapuzdrenie, polymorfizmus</a:t>
-            </a:r>
-          </a:p>
-          <a:p>
-            <a:pPr lvl="1">
-              <a:spcBef>
-                <a:spcPts val="1200"/>
-              </a:spcBef>
-            </a:pPr>
-            <a:r>
-              <a:rPr lang="sk-SK" sz="2800" i="1" dirty="0"/>
-              <a:t>Funkcionálne:</a:t>
-            </a:r>
-            <a:r>
-              <a:rPr lang="sk-SK" sz="2800" dirty="0"/>
-              <a:t> anonymné funkcie, </a:t>
-            </a:r>
-            <a:br>
-              <a:rPr lang="sk-SK" sz="2800" dirty="0"/>
-            </a:br>
-            <a:r>
-              <a:rPr lang="sk-SK" sz="2800" dirty="0" err="1"/>
-              <a:t>high-order</a:t>
-            </a:r>
-            <a:r>
-              <a:rPr lang="sk-SK" sz="2800" dirty="0"/>
-              <a:t> funkcie</a:t>
-            </a:r>
+            <a:endParaRPr lang="sk-SK" sz="2800" dirty="0"/>
           </a:p>
         </p:txBody>
       </p:sp>
@@ -5046,7 +5639,242 @@
 </p:sld>
 </file>
 
-<file path=ppt/slides/slide7.xml><?xml version="1.0" encoding="utf-8"?>
+<file path=ppt/slides/slide8.xml><?xml version="1.0" encoding="utf-8"?>
+<p:sld xmlns:a="http://schemas.openxmlformats.org/drawingml/2006/main" xmlns:r="http://schemas.openxmlformats.org/officeDocument/2006/relationships" xmlns:p="http://schemas.openxmlformats.org/presentationml/2006/main">
+  <p:cSld>
+    <p:spTree>
+      <p:nvGrpSpPr>
+        <p:cNvPr id="1" name="">
+          <a:extLst>
+            <a:ext uri="{FF2B5EF4-FFF2-40B4-BE49-F238E27FC236}">
+              <a16:creationId xmlns:a16="http://schemas.microsoft.com/office/drawing/2014/main" id="{DB99173E-D670-2028-DD0C-014E6EACC150}"/>
+            </a:ext>
+          </a:extLst>
+        </p:cNvPr>
+        <p:cNvGrpSpPr/>
+        <p:nvPr/>
+      </p:nvGrpSpPr>
+      <p:grpSpPr>
+        <a:xfrm>
+          <a:off x="0" y="0"/>
+          <a:ext cx="0" cy="0"/>
+          <a:chOff x="0" y="0"/>
+          <a:chExt cx="0" cy="0"/>
+        </a:xfrm>
+      </p:grpSpPr>
+      <p:sp>
+        <p:nvSpPr>
+          <p:cNvPr id="2" name="Nadpis 1">
+            <a:extLst>
+              <a:ext uri="{FF2B5EF4-FFF2-40B4-BE49-F238E27FC236}">
+                <a16:creationId xmlns:a16="http://schemas.microsoft.com/office/drawing/2014/main" id="{57E44211-8F34-7A27-AAE9-0C78780E1114}"/>
+              </a:ext>
+            </a:extLst>
+          </p:cNvPr>
+          <p:cNvSpPr>
+            <a:spLocks noGrp="1"/>
+          </p:cNvSpPr>
+          <p:nvPr>
+            <p:ph type="title"/>
+          </p:nvPr>
+        </p:nvSpPr>
+        <p:spPr/>
+        <p:txBody>
+          <a:bodyPr/>
+          <a:lstStyle/>
+          <a:p>
+            <a:r>
+              <a:rPr lang="sk-SK" dirty="0">
+                <a:solidFill>
+                  <a:srgbClr val="FF0000"/>
+                </a:solidFill>
+                <a:highlight>
+                  <a:srgbClr val="00FFFF"/>
+                </a:highlight>
+              </a:rPr>
+              <a:t>Objektovo orientované programovanie</a:t>
+            </a:r>
+          </a:p>
+        </p:txBody>
+      </p:sp>
+      <p:sp>
+        <p:nvSpPr>
+          <p:cNvPr id="3" name="Zástupný objekt pre obsah 2">
+            <a:extLst>
+              <a:ext uri="{FF2B5EF4-FFF2-40B4-BE49-F238E27FC236}">
+                <a16:creationId xmlns:a16="http://schemas.microsoft.com/office/drawing/2014/main" id="{8A496A00-DF86-7B3A-B1EF-15B0E9DA2C86}"/>
+              </a:ext>
+            </a:extLst>
+          </p:cNvPr>
+          <p:cNvSpPr>
+            <a:spLocks noGrp="1"/>
+          </p:cNvSpPr>
+          <p:nvPr>
+            <p:ph idx="1"/>
+          </p:nvPr>
+        </p:nvSpPr>
+        <p:spPr>
+          <a:xfrm>
+            <a:off x="1199536" y="1855121"/>
+            <a:ext cx="10245212" cy="4351338"/>
+          </a:xfrm>
+        </p:spPr>
+        <p:txBody>
+          <a:bodyPr>
+            <a:normAutofit/>
+          </a:bodyPr>
+          <a:lstStyle/>
+          <a:p>
+            <a:pPr marL="0" indent="0">
+              <a:spcBef>
+                <a:spcPts val="1200"/>
+              </a:spcBef>
+              <a:buNone/>
+            </a:pPr>
+            <a:r>
+              <a:rPr lang="sk-SK" sz="2800" dirty="0">
+                <a:solidFill>
+                  <a:srgbClr val="FF0000"/>
+                </a:solidFill>
+                <a:highlight>
+                  <a:srgbClr val="00FFFF"/>
+                </a:highlight>
+              </a:rPr>
+              <a:t>Paradigmy v programovaní</a:t>
+            </a:r>
+            <a:r>
+              <a:rPr lang="sk-SK" sz="2800" dirty="0"/>
+              <a:t>:</a:t>
+            </a:r>
+          </a:p>
+          <a:p>
+            <a:pPr lvl="1">
+              <a:spcBef>
+                <a:spcPts val="1200"/>
+              </a:spcBef>
+            </a:pPr>
+            <a:r>
+              <a:rPr lang="sk-SK" sz="2800" i="1" dirty="0">
+                <a:solidFill>
+                  <a:srgbClr val="FF0000"/>
+                </a:solidFill>
+                <a:highlight>
+                  <a:srgbClr val="00FFFF"/>
+                </a:highlight>
+              </a:rPr>
+              <a:t>Štruktúrované</a:t>
+            </a:r>
+            <a:r>
+              <a:rPr lang="sk-SK" sz="2800" i="1" dirty="0"/>
+              <a:t>:</a:t>
+            </a:r>
+            <a:r>
+              <a:rPr lang="sk-SK" sz="2800" dirty="0"/>
+              <a:t> sekvencie príkazov, podmienky, cykly</a:t>
+            </a:r>
+          </a:p>
+          <a:p>
+            <a:pPr lvl="1">
+              <a:spcBef>
+                <a:spcPts val="1200"/>
+              </a:spcBef>
+            </a:pPr>
+            <a:r>
+              <a:rPr lang="sk-SK" sz="2800" i="1" dirty="0">
+                <a:solidFill>
+                  <a:srgbClr val="FF0000"/>
+                </a:solidFill>
+                <a:highlight>
+                  <a:srgbClr val="00FFFF"/>
+                </a:highlight>
+              </a:rPr>
+              <a:t>Procedurálne</a:t>
+            </a:r>
+            <a:r>
+              <a:rPr lang="sk-SK" sz="2800" i="1" dirty="0"/>
+              <a:t>:</a:t>
+            </a:r>
+            <a:r>
+              <a:rPr lang="sk-SK" sz="2800" dirty="0"/>
+              <a:t> podprogramy, ktoré sa vedia navzájom volať</a:t>
+            </a:r>
+          </a:p>
+          <a:p>
+            <a:pPr lvl="1">
+              <a:spcBef>
+                <a:spcPts val="1200"/>
+              </a:spcBef>
+            </a:pPr>
+            <a:r>
+              <a:rPr lang="sk-SK" sz="2800" i="1" dirty="0">
+                <a:solidFill>
+                  <a:srgbClr val="FF0000"/>
+                </a:solidFill>
+                <a:highlight>
+                  <a:srgbClr val="00FFFF"/>
+                </a:highlight>
+              </a:rPr>
+              <a:t>Objektovo orientované</a:t>
+            </a:r>
+            <a:r>
+              <a:rPr lang="sk-SK" sz="2800" i="1" dirty="0"/>
+              <a:t>:</a:t>
+            </a:r>
+            <a:r>
+              <a:rPr lang="sk-SK" sz="2800" dirty="0"/>
+              <a:t> objekty, zapuzdrenie, polymorfizmus</a:t>
+            </a:r>
+          </a:p>
+          <a:p>
+            <a:pPr lvl="1">
+              <a:spcBef>
+                <a:spcPts val="1200"/>
+              </a:spcBef>
+            </a:pPr>
+            <a:r>
+              <a:rPr lang="sk-SK" sz="2800" i="1" dirty="0">
+                <a:solidFill>
+                  <a:srgbClr val="FF0000"/>
+                </a:solidFill>
+                <a:highlight>
+                  <a:srgbClr val="00FFFF"/>
+                </a:highlight>
+              </a:rPr>
+              <a:t>Funkcionálne</a:t>
+            </a:r>
+            <a:r>
+              <a:rPr lang="sk-SK" sz="2800" i="1" dirty="0"/>
+              <a:t>:</a:t>
+            </a:r>
+            <a:r>
+              <a:rPr lang="sk-SK" sz="2800" dirty="0"/>
+              <a:t> anonymné funkcie, </a:t>
+            </a:r>
+            <a:r>
+              <a:rPr lang="sk-SK" sz="2800" dirty="0" err="1"/>
+              <a:t>high-order</a:t>
+            </a:r>
+            <a:r>
+              <a:rPr lang="sk-SK" sz="2800" dirty="0"/>
+              <a:t> funkcie</a:t>
+            </a:r>
+          </a:p>
+        </p:txBody>
+      </p:sp>
+    </p:spTree>
+    <p:extLst>
+      <p:ext uri="{BB962C8B-B14F-4D97-AF65-F5344CB8AC3E}">
+        <p14:creationId xmlns:p14="http://schemas.microsoft.com/office/powerpoint/2010/main" val="3537281296"/>
+      </p:ext>
+    </p:extLst>
+  </p:cSld>
+  <p:clrMapOvr>
+    <a:masterClrMapping/>
+  </p:clrMapOvr>
+</p:sld>
+</file>
+
+<file path=ppt/slides/slide9.xml><?xml version="1.0" encoding="utf-8"?>
 <p:sld xmlns:a="http://schemas.openxmlformats.org/drawingml/2006/main" xmlns:r="http://schemas.openxmlformats.org/officeDocument/2006/relationships" xmlns:p="http://schemas.openxmlformats.org/presentationml/2006/main">
   <p:cSld>
     <p:spTree>
@@ -5115,8 +5943,8 @@
         </p:nvSpPr>
         <p:spPr>
           <a:xfrm>
-            <a:off x="2152651" y="1825625"/>
-            <a:ext cx="6936921" cy="4351338"/>
+            <a:off x="1267748" y="1805960"/>
+            <a:ext cx="9547736" cy="4351338"/>
           </a:xfrm>
         </p:spPr>
         <p:txBody>
@@ -5132,8 +5960,15 @@
               <a:buNone/>
             </a:pPr>
             <a:r>
-              <a:rPr lang="sk-SK" sz="2800" dirty="0"/>
-              <a:t>OOP:</a:t>
+              <a:rPr lang="sk-SK" sz="2800" dirty="0">
+                <a:solidFill>
+                  <a:srgbClr val="FF0000"/>
+                </a:solidFill>
+                <a:highlight>
+                  <a:srgbClr val="00FFFF"/>
+                </a:highlight>
+              </a:rPr>
+              <a:t>Vlastnosti:</a:t>
             </a:r>
           </a:p>
           <a:p>
@@ -5143,8 +5978,15 @@
               </a:spcBef>
             </a:pPr>
             <a:r>
-              <a:rPr lang="sk-SK" sz="2800" dirty="0"/>
-              <a:t>modeluje podľa nášho vnímania sveta</a:t>
+              <a:rPr lang="sk-SK" sz="2800" dirty="0">
+                <a:solidFill>
+                  <a:srgbClr val="FF0000"/>
+                </a:solidFill>
+                <a:highlight>
+                  <a:srgbClr val="00FFFF"/>
+                </a:highlight>
+              </a:rPr>
+              <a:t>intuitívne modely podľa nášho sveta</a:t>
             </a:r>
           </a:p>
           <a:p>
@@ -5154,7 +5996,14 @@
               </a:spcBef>
             </a:pPr>
             <a:r>
-              <a:rPr lang="sk-SK" sz="2800" dirty="0"/>
+              <a:rPr lang="sk-SK" sz="2800" dirty="0">
+                <a:solidFill>
+                  <a:srgbClr val="FF0000"/>
+                </a:solidFill>
+                <a:highlight>
+                  <a:srgbClr val="00FFFF"/>
+                </a:highlight>
+              </a:rPr>
               <a:t>zvláda väčšiu komplexnosť</a:t>
             </a:r>
           </a:p>
@@ -5165,29 +6014,24 @@
               </a:spcBef>
             </a:pPr>
             <a:r>
-              <a:rPr lang="sk-SK" sz="2800" dirty="0"/>
-              <a:t>umožňuje </a:t>
-            </a:r>
-            <a:r>
-              <a:rPr lang="sk-SK" sz="2800" dirty="0" err="1"/>
+              <a:rPr lang="sk-SK" sz="2800" dirty="0" err="1">
+                <a:solidFill>
+                  <a:srgbClr val="FF0000"/>
+                </a:solidFill>
+                <a:highlight>
+                  <a:srgbClr val="00FFFF"/>
+                </a:highlight>
+              </a:rPr>
               <a:t>znovupoužitie</a:t>
             </a:r>
-            <a:endParaRPr lang="sk-SK" sz="2800" dirty="0"/>
-          </a:p>
-          <a:p>
-            <a:pPr lvl="1">
-              <a:spcBef>
-                <a:spcPts val="1200"/>
-              </a:spcBef>
-            </a:pPr>
-            <a:r>
-              <a:rPr lang="sk-SK" sz="2800" dirty="0"/>
-              <a:t>intuitívna organizácia kód</a:t>
-            </a:r>
-            <a:r>
-              <a:rPr lang="sk-SK" sz="2500" dirty="0"/>
-              <a:t>u</a:t>
-            </a:r>
+            <a:endParaRPr lang="sk-SK" sz="2500" dirty="0">
+              <a:solidFill>
+                <a:srgbClr val="FF0000"/>
+              </a:solidFill>
+              <a:highlight>
+                <a:srgbClr val="00FFFF"/>
+              </a:highlight>
+            </a:endParaRPr>
           </a:p>
         </p:txBody>
       </p:sp>
@@ -5195,312 +6039,6 @@
     <p:extLst>
       <p:ext uri="{BB962C8B-B14F-4D97-AF65-F5344CB8AC3E}">
         <p14:creationId xmlns:p14="http://schemas.microsoft.com/office/powerpoint/2010/main" val="359848618"/>
-      </p:ext>
-    </p:extLst>
-  </p:cSld>
-  <p:clrMapOvr>
-    <a:masterClrMapping/>
-  </p:clrMapOvr>
-</p:sld>
-</file>
-
-<file path=ppt/slides/slide8.xml><?xml version="1.0" encoding="utf-8"?>
-<p:sld xmlns:a="http://schemas.openxmlformats.org/drawingml/2006/main" xmlns:r="http://schemas.openxmlformats.org/officeDocument/2006/relationships" xmlns:p="http://schemas.openxmlformats.org/presentationml/2006/main">
-  <p:cSld>
-    <p:spTree>
-      <p:nvGrpSpPr>
-        <p:cNvPr id="1" name=""/>
-        <p:cNvGrpSpPr/>
-        <p:nvPr/>
-      </p:nvGrpSpPr>
-      <p:grpSpPr>
-        <a:xfrm>
-          <a:off x="0" y="0"/>
-          <a:ext cx="0" cy="0"/>
-          <a:chOff x="0" y="0"/>
-          <a:chExt cx="0" cy="0"/>
-        </a:xfrm>
-      </p:grpSpPr>
-      <p:sp>
-        <p:nvSpPr>
-          <p:cNvPr id="2" name="Nadpis 1">
-            <a:extLst>
-              <a:ext uri="{FF2B5EF4-FFF2-40B4-BE49-F238E27FC236}">
-                <a16:creationId xmlns:a16="http://schemas.microsoft.com/office/drawing/2014/main" id="{9614D3A7-D39F-DFA8-1324-8EE3D634FE37}"/>
-              </a:ext>
-            </a:extLst>
-          </p:cNvPr>
-          <p:cNvSpPr>
-            <a:spLocks noGrp="1"/>
-          </p:cNvSpPr>
-          <p:nvPr>
-            <p:ph type="title"/>
-          </p:nvPr>
-        </p:nvSpPr>
-        <p:spPr/>
-        <p:txBody>
-          <a:bodyPr/>
-          <a:lstStyle/>
-          <a:p>
-            <a:r>
-              <a:rPr lang="sk-SK" dirty="0"/>
-              <a:t>Jazyk Java</a:t>
-            </a:r>
-          </a:p>
-        </p:txBody>
-      </p:sp>
-      <p:sp>
-        <p:nvSpPr>
-          <p:cNvPr id="3" name="Zástupný objekt pre obsah 2">
-            <a:extLst>
-              <a:ext uri="{FF2B5EF4-FFF2-40B4-BE49-F238E27FC236}">
-                <a16:creationId xmlns:a16="http://schemas.microsoft.com/office/drawing/2014/main" id="{1B6002A4-F245-D51B-5778-6E5E9ACC6532}"/>
-              </a:ext>
-            </a:extLst>
-          </p:cNvPr>
-          <p:cNvSpPr>
-            <a:spLocks noGrp="1"/>
-          </p:cNvSpPr>
-          <p:nvPr>
-            <p:ph idx="1"/>
-          </p:nvPr>
-        </p:nvSpPr>
-        <p:spPr/>
-        <p:txBody>
-          <a:bodyPr>
-            <a:normAutofit/>
-          </a:bodyPr>
-          <a:lstStyle/>
-          <a:p>
-            <a:pPr marL="0" indent="0">
-              <a:spcBef>
-                <a:spcPts val="1200"/>
-              </a:spcBef>
-              <a:buNone/>
-            </a:pPr>
-            <a:r>
-              <a:rPr lang="sk-SK" sz="2800" dirty="0"/>
-              <a:t>Vlastnosti:</a:t>
-            </a:r>
-          </a:p>
-          <a:p>
-            <a:pPr lvl="1">
-              <a:spcBef>
-                <a:spcPts val="1200"/>
-              </a:spcBef>
-            </a:pPr>
-            <a:r>
-              <a:rPr lang="sk-SK" sz="2800" dirty="0"/>
-              <a:t>objektovo orientovaný</a:t>
-            </a:r>
-          </a:p>
-          <a:p>
-            <a:pPr lvl="1">
-              <a:spcBef>
-                <a:spcPts val="1200"/>
-              </a:spcBef>
-            </a:pPr>
-            <a:r>
-              <a:rPr lang="sk-SK" sz="2800" dirty="0"/>
-              <a:t>univerzálny</a:t>
-            </a:r>
-          </a:p>
-          <a:p>
-            <a:pPr lvl="1">
-              <a:spcBef>
-                <a:spcPts val="1200"/>
-              </a:spcBef>
-            </a:pPr>
-            <a:r>
-              <a:rPr lang="sk-SK" sz="2800" dirty="0"/>
-              <a:t>platformovo nezávislý </a:t>
-            </a:r>
-          </a:p>
-          <a:p>
-            <a:pPr lvl="1">
-              <a:spcBef>
-                <a:spcPts val="1200"/>
-              </a:spcBef>
-            </a:pPr>
-            <a:r>
-              <a:rPr lang="sk-SK" sz="2800" dirty="0" err="1"/>
-              <a:t>staticko</a:t>
-            </a:r>
-            <a:r>
-              <a:rPr lang="sk-SK" sz="2800" dirty="0"/>
-              <a:t> typovaný: typy premenných sú kontrolované pri kompilácii </a:t>
-            </a:r>
-          </a:p>
-        </p:txBody>
-      </p:sp>
-    </p:spTree>
-    <p:extLst>
-      <p:ext uri="{BB962C8B-B14F-4D97-AF65-F5344CB8AC3E}">
-        <p14:creationId xmlns:p14="http://schemas.microsoft.com/office/powerpoint/2010/main" val="1498939752"/>
-      </p:ext>
-    </p:extLst>
-  </p:cSld>
-  <p:clrMapOvr>
-    <a:masterClrMapping/>
-  </p:clrMapOvr>
-</p:sld>
-</file>
-
-<file path=ppt/slides/slide9.xml><?xml version="1.0" encoding="utf-8"?>
-<p:sld xmlns:a="http://schemas.openxmlformats.org/drawingml/2006/main" xmlns:r="http://schemas.openxmlformats.org/officeDocument/2006/relationships" xmlns:p="http://schemas.openxmlformats.org/presentationml/2006/main">
-  <p:cSld>
-    <p:spTree>
-      <p:nvGrpSpPr>
-        <p:cNvPr id="1" name="">
-          <a:extLst>
-            <a:ext uri="{FF2B5EF4-FFF2-40B4-BE49-F238E27FC236}">
-              <a16:creationId xmlns:a16="http://schemas.microsoft.com/office/drawing/2014/main" id="{96D93EFC-746C-98C9-3659-DF243064562F}"/>
-            </a:ext>
-          </a:extLst>
-        </p:cNvPr>
-        <p:cNvGrpSpPr/>
-        <p:nvPr/>
-      </p:nvGrpSpPr>
-      <p:grpSpPr>
-        <a:xfrm>
-          <a:off x="0" y="0"/>
-          <a:ext cx="0" cy="0"/>
-          <a:chOff x="0" y="0"/>
-          <a:chExt cx="0" cy="0"/>
-        </a:xfrm>
-      </p:grpSpPr>
-      <p:sp>
-        <p:nvSpPr>
-          <p:cNvPr id="2" name="Nadpis 1">
-            <a:extLst>
-              <a:ext uri="{FF2B5EF4-FFF2-40B4-BE49-F238E27FC236}">
-                <a16:creationId xmlns:a16="http://schemas.microsoft.com/office/drawing/2014/main" id="{99DF7CD8-BD90-B9A9-1BD7-5D3BD9ECC44D}"/>
-              </a:ext>
-            </a:extLst>
-          </p:cNvPr>
-          <p:cNvSpPr>
-            <a:spLocks noGrp="1"/>
-          </p:cNvSpPr>
-          <p:nvPr>
-            <p:ph type="title"/>
-          </p:nvPr>
-        </p:nvSpPr>
-        <p:spPr/>
-        <p:txBody>
-          <a:bodyPr/>
-          <a:lstStyle/>
-          <a:p>
-            <a:r>
-              <a:rPr lang="sk-SK" dirty="0"/>
-              <a:t>Jazyk Java</a:t>
-            </a:r>
-          </a:p>
-        </p:txBody>
-      </p:sp>
-      <p:sp>
-        <p:nvSpPr>
-          <p:cNvPr id="3" name="Zástupný objekt pre obsah 2">
-            <a:extLst>
-              <a:ext uri="{FF2B5EF4-FFF2-40B4-BE49-F238E27FC236}">
-                <a16:creationId xmlns:a16="http://schemas.microsoft.com/office/drawing/2014/main" id="{994ACF6C-ED2C-AD2A-100D-0BFD2F7EE608}"/>
-              </a:ext>
-            </a:extLst>
-          </p:cNvPr>
-          <p:cNvSpPr>
-            <a:spLocks noGrp="1"/>
-          </p:cNvSpPr>
-          <p:nvPr>
-            <p:ph idx="1"/>
-          </p:nvPr>
-        </p:nvSpPr>
-        <p:spPr/>
-        <p:txBody>
-          <a:bodyPr>
-            <a:normAutofit/>
-          </a:bodyPr>
-          <a:lstStyle/>
-          <a:p>
-            <a:pPr marL="0" indent="0">
-              <a:spcBef>
-                <a:spcPts val="1200"/>
-              </a:spcBef>
-              <a:buNone/>
-            </a:pPr>
-            <a:r>
-              <a:rPr lang="sk-SK" sz="2800" dirty="0"/>
-              <a:t>Použitie:</a:t>
-            </a:r>
-          </a:p>
-          <a:p>
-            <a:pPr lvl="1">
-              <a:spcBef>
-                <a:spcPts val="1200"/>
-              </a:spcBef>
-            </a:pPr>
-            <a:r>
-              <a:rPr lang="sk-SK" sz="2800" dirty="0"/>
-              <a:t>veľké podnikové systémy</a:t>
-            </a:r>
-          </a:p>
-          <a:p>
-            <a:pPr lvl="1">
-              <a:spcBef>
-                <a:spcPts val="1200"/>
-              </a:spcBef>
-            </a:pPr>
-            <a:r>
-              <a:rPr lang="sk-SK" sz="2800" dirty="0"/>
-              <a:t>webový </a:t>
-            </a:r>
-            <a:r>
-              <a:rPr lang="sk-SK" sz="2800" dirty="0" err="1"/>
-              <a:t>back</a:t>
-            </a:r>
-            <a:r>
-              <a:rPr lang="sk-SK" sz="2800" dirty="0"/>
-              <a:t>-end</a:t>
-            </a:r>
-          </a:p>
-          <a:p>
-            <a:pPr lvl="1">
-              <a:spcBef>
-                <a:spcPts val="1200"/>
-              </a:spcBef>
-            </a:pPr>
-            <a:r>
-              <a:rPr lang="sk-SK" sz="2800" dirty="0"/>
-              <a:t>Android aplikácie </a:t>
-            </a:r>
-            <a:r>
-              <a:rPr lang="sk-SK" sz="2800" i="1" dirty="0"/>
-              <a:t>(jazyk </a:t>
-            </a:r>
-            <a:r>
-              <a:rPr lang="sk-SK" sz="2800" i="1" dirty="0" err="1"/>
-              <a:t>Kotlin</a:t>
-            </a:r>
-            <a:r>
-              <a:rPr lang="sk-SK" sz="2800" i="1" dirty="0"/>
-              <a:t>)</a:t>
-            </a:r>
-          </a:p>
-          <a:p>
-            <a:pPr lvl="1">
-              <a:spcBef>
-                <a:spcPts val="1200"/>
-              </a:spcBef>
-            </a:pPr>
-            <a:r>
-              <a:rPr lang="sk-SK" sz="2800" dirty="0"/>
-              <a:t>cloudové a distribuované systémy</a:t>
-            </a:r>
-          </a:p>
-        </p:txBody>
-      </p:sp>
-    </p:spTree>
-    <p:extLst>
-      <p:ext uri="{BB962C8B-B14F-4D97-AF65-F5344CB8AC3E}">
-        <p14:creationId xmlns:p14="http://schemas.microsoft.com/office/powerpoint/2010/main" val="4097473582"/>
       </p:ext>
     </p:extLst>
   </p:cSld>
